--- a/output_pptx/All_My_Fountains.pptx
+++ b/output_pptx/All_My_Fountains.pptx
@@ -3109,8 +3109,8 @@
         </p:nvSpPr>
         <p:spPr>
           <a:xfrm>
-            <a:off x="594360" y="2258568"/>
-            <a:ext cx="11002975" cy="685800"/>
+            <a:off x="640080" y="2052828"/>
+            <a:ext cx="10911535" cy="731520"/>
           </a:xfrm>
           <a:prstGeom prst="rect">
             <a:avLst/>
@@ -3125,7 +3125,7 @@
           <a:p>
             <a:pPr algn="ctr"/>
             <a:r>
-              <a:rPr sz="4400" b="1" i="0">
+              <a:rPr sz="4800" b="1" i="0">
                 <a:solidFill>
                   <a:srgbClr val="FFFFFF"/>
                 </a:solidFill>
@@ -3144,8 +3144,8 @@
         </p:nvSpPr>
         <p:spPr>
           <a:xfrm>
-            <a:off x="594360" y="2980944"/>
-            <a:ext cx="11002975" cy="347472"/>
+            <a:off x="640080" y="2985516"/>
+            <a:ext cx="10911535" cy="731520"/>
           </a:xfrm>
           <a:prstGeom prst="rect">
             <a:avLst/>
@@ -3160,83 +3160,13 @@
           <a:p>
             <a:pPr algn="ctr"/>
             <a:r>
-              <a:rPr sz="2200" b="0" i="1">
-                <a:solidFill>
-                  <a:srgbClr val="8C8C8C"/>
-                </a:solidFill>
-                <a:latin typeface="Arial"/>
-              </a:rPr>
-              <a:t/>
-            </a:r>
-          </a:p>
-        </p:txBody>
-      </p:sp>
-      <p:sp>
-        <p:nvSpPr>
-          <p:cNvPr id="4" name="TextBox 3"/>
-          <p:cNvSpPr txBox="1"/>
-          <p:nvPr/>
-        </p:nvSpPr>
-        <p:spPr>
-          <a:xfrm>
-            <a:off x="594360" y="3529584"/>
-            <a:ext cx="11002975" cy="685800"/>
-          </a:xfrm>
-          <a:prstGeom prst="rect">
-            <a:avLst/>
-          </a:prstGeom>
-          <a:noFill/>
-        </p:spPr>
-        <p:txBody>
-          <a:bodyPr wrap="square">
-            <a:spAutoFit/>
-          </a:bodyPr>
-          <a:lstStyle/>
-          <a:p>
-            <a:pPr algn="ctr"/>
-            <a:r>
-              <a:rPr sz="4400" b="1" i="0">
+              <a:rPr sz="4800" b="1" i="0">
                 <a:solidFill>
                   <a:srgbClr val="FFFFFF"/>
                 </a:solidFill>
                 <a:latin typeface="Arial"/>
               </a:rPr>
               <a:t>Estão em ti Amado</a:t>
-            </a:r>
-          </a:p>
-        </p:txBody>
-      </p:sp>
-      <p:sp>
-        <p:nvSpPr>
-          <p:cNvPr id="5" name="TextBox 4"/>
-          <p:cNvSpPr txBox="1"/>
-          <p:nvPr/>
-        </p:nvSpPr>
-        <p:spPr>
-          <a:xfrm>
-            <a:off x="594360" y="4251960"/>
-            <a:ext cx="11002975" cy="347472"/>
-          </a:xfrm>
-          <a:prstGeom prst="rect">
-            <a:avLst/>
-          </a:prstGeom>
-          <a:noFill/>
-        </p:spPr>
-        <p:txBody>
-          <a:bodyPr wrap="square">
-            <a:spAutoFit/>
-          </a:bodyPr>
-          <a:lstStyle/>
-          <a:p>
-            <a:pPr algn="ctr"/>
-            <a:r>
-              <a:rPr sz="2200" b="0" i="1">
-                <a:solidFill>
-                  <a:srgbClr val="8C8C8C"/>
-                </a:solidFill>
-                <a:latin typeface="Arial"/>
-              </a:rPr>
-              <a:t/>
             </a:r>
           </a:p>
         </p:txBody>
@@ -3275,8 +3205,8 @@
         </p:nvSpPr>
         <p:spPr>
           <a:xfrm>
-            <a:off x="594360" y="2258568"/>
-            <a:ext cx="11002975" cy="685800"/>
+            <a:off x="640080" y="2052828"/>
+            <a:ext cx="10911535" cy="731520"/>
           </a:xfrm>
           <a:prstGeom prst="rect">
             <a:avLst/>
@@ -3291,7 +3221,7 @@
           <a:p>
             <a:pPr algn="ctr"/>
             <a:r>
-              <a:rPr sz="4400" b="1" i="0">
+              <a:rPr sz="4800" b="1" i="0">
                 <a:solidFill>
                   <a:srgbClr val="FFFFFF"/>
                 </a:solidFill>
@@ -3310,8 +3240,8 @@
         </p:nvSpPr>
         <p:spPr>
           <a:xfrm>
-            <a:off x="594360" y="2980944"/>
-            <a:ext cx="11002975" cy="347472"/>
+            <a:off x="640080" y="2985516"/>
+            <a:ext cx="10911535" cy="731520"/>
           </a:xfrm>
           <a:prstGeom prst="rect">
             <a:avLst/>
@@ -3326,83 +3256,13 @@
           <a:p>
             <a:pPr algn="ctr"/>
             <a:r>
-              <a:rPr sz="2200" b="0" i="1">
-                <a:solidFill>
-                  <a:srgbClr val="8C8C8C"/>
-                </a:solidFill>
-                <a:latin typeface="Arial"/>
-              </a:rPr>
-              <a:t/>
-            </a:r>
-          </a:p>
-        </p:txBody>
-      </p:sp>
-      <p:sp>
-        <p:nvSpPr>
-          <p:cNvPr id="4" name="TextBox 3"/>
-          <p:cNvSpPr txBox="1"/>
-          <p:nvPr/>
-        </p:nvSpPr>
-        <p:spPr>
-          <a:xfrm>
-            <a:off x="594360" y="3529584"/>
-            <a:ext cx="11002975" cy="685800"/>
-          </a:xfrm>
-          <a:prstGeom prst="rect">
-            <a:avLst/>
-          </a:prstGeom>
-          <a:noFill/>
-        </p:spPr>
-        <p:txBody>
-          <a:bodyPr wrap="square">
-            <a:spAutoFit/>
-          </a:bodyPr>
-          <a:lstStyle/>
-          <a:p>
-            <a:pPr algn="ctr"/>
-            <a:r>
-              <a:rPr sz="4400" b="1" i="0">
+              <a:rPr sz="4800" b="1" i="0">
                 <a:solidFill>
                   <a:srgbClr val="FFFFFF"/>
                 </a:solidFill>
                 <a:latin typeface="Arial"/>
               </a:rPr>
               <a:t>Venha Água Viva</a:t>
-            </a:r>
-          </a:p>
-        </p:txBody>
-      </p:sp>
-      <p:sp>
-        <p:nvSpPr>
-          <p:cNvPr id="5" name="TextBox 4"/>
-          <p:cNvSpPr txBox="1"/>
-          <p:nvPr/>
-        </p:nvSpPr>
-        <p:spPr>
-          <a:xfrm>
-            <a:off x="594360" y="4251960"/>
-            <a:ext cx="11002975" cy="347472"/>
-          </a:xfrm>
-          <a:prstGeom prst="rect">
-            <a:avLst/>
-          </a:prstGeom>
-          <a:noFill/>
-        </p:spPr>
-        <p:txBody>
-          <a:bodyPr wrap="square">
-            <a:spAutoFit/>
-          </a:bodyPr>
-          <a:lstStyle/>
-          <a:p>
-            <a:pPr algn="ctr"/>
-            <a:r>
-              <a:rPr sz="2200" b="0" i="1">
-                <a:solidFill>
-                  <a:srgbClr val="8C8C8C"/>
-                </a:solidFill>
-                <a:latin typeface="Arial"/>
-              </a:rPr>
-              <a:t/>
             </a:r>
           </a:p>
         </p:txBody>
@@ -3441,8 +3301,8 @@
         </p:nvSpPr>
         <p:spPr>
           <a:xfrm>
-            <a:off x="594360" y="2258568"/>
-            <a:ext cx="11002975" cy="685800"/>
+            <a:off x="640080" y="2052828"/>
+            <a:ext cx="10911535" cy="731520"/>
           </a:xfrm>
           <a:prstGeom prst="rect">
             <a:avLst/>
@@ -3457,7 +3317,7 @@
           <a:p>
             <a:pPr algn="ctr"/>
             <a:r>
-              <a:rPr sz="3911" b="1" i="0">
+              <a:rPr sz="4200" b="1" i="0">
                 <a:solidFill>
                   <a:srgbClr val="FFFFFF"/>
                 </a:solidFill>
@@ -3476,8 +3336,8 @@
         </p:nvSpPr>
         <p:spPr>
           <a:xfrm>
-            <a:off x="594360" y="2980944"/>
-            <a:ext cx="11002975" cy="347472"/>
+            <a:off x="640080" y="2985516"/>
+            <a:ext cx="10911535" cy="731520"/>
           </a:xfrm>
           <a:prstGeom prst="rect">
             <a:avLst/>
@@ -3492,83 +3352,13 @@
           <a:p>
             <a:pPr algn="ctr"/>
             <a:r>
-              <a:rPr sz="2200" b="0" i="1">
-                <a:solidFill>
-                  <a:srgbClr val="8C8C8C"/>
-                </a:solidFill>
-                <a:latin typeface="Arial"/>
-              </a:rPr>
-              <a:t/>
-            </a:r>
-          </a:p>
-        </p:txBody>
-      </p:sp>
-      <p:sp>
-        <p:nvSpPr>
-          <p:cNvPr id="4" name="TextBox 3"/>
-          <p:cNvSpPr txBox="1"/>
-          <p:nvPr/>
-        </p:nvSpPr>
-        <p:spPr>
-          <a:xfrm>
-            <a:off x="594360" y="3529584"/>
-            <a:ext cx="11002975" cy="685800"/>
-          </a:xfrm>
-          <a:prstGeom prst="rect">
-            <a:avLst/>
-          </a:prstGeom>
-          <a:noFill/>
-        </p:spPr>
-        <p:txBody>
-          <a:bodyPr wrap="square">
-            <a:spAutoFit/>
-          </a:bodyPr>
-          <a:lstStyle/>
-          <a:p>
-            <a:pPr algn="ctr"/>
-            <a:r>
-              <a:rPr sz="4400" b="1" i="0">
+              <a:rPr sz="4800" b="1" i="0">
                 <a:solidFill>
                   <a:srgbClr val="FFFFFF"/>
                 </a:solidFill>
                 <a:latin typeface="Arial"/>
               </a:rPr>
               <a:t>Todas as minhas fontes</a:t>
-            </a:r>
-          </a:p>
-        </p:txBody>
-      </p:sp>
-      <p:sp>
-        <p:nvSpPr>
-          <p:cNvPr id="5" name="TextBox 4"/>
-          <p:cNvSpPr txBox="1"/>
-          <p:nvPr/>
-        </p:nvSpPr>
-        <p:spPr>
-          <a:xfrm>
-            <a:off x="594360" y="4251960"/>
-            <a:ext cx="11002975" cy="347472"/>
-          </a:xfrm>
-          <a:prstGeom prst="rect">
-            <a:avLst/>
-          </a:prstGeom>
-          <a:noFill/>
-        </p:spPr>
-        <p:txBody>
-          <a:bodyPr wrap="square">
-            <a:spAutoFit/>
-          </a:bodyPr>
-          <a:lstStyle/>
-          <a:p>
-            <a:pPr algn="ctr"/>
-            <a:r>
-              <a:rPr sz="2200" b="0" i="1">
-                <a:solidFill>
-                  <a:srgbClr val="8C8C8C"/>
-                </a:solidFill>
-                <a:latin typeface="Arial"/>
-              </a:rPr>
-              <a:t/>
             </a:r>
           </a:p>
         </p:txBody>
@@ -3607,8 +3397,8 @@
         </p:nvSpPr>
         <p:spPr>
           <a:xfrm>
-            <a:off x="594360" y="2894076"/>
-            <a:ext cx="11002975" cy="685800"/>
+            <a:off x="640080" y="2702052"/>
+            <a:ext cx="10911535" cy="731520"/>
           </a:xfrm>
           <a:prstGeom prst="rect">
             <a:avLst/>
@@ -3623,48 +3413,13 @@
           <a:p>
             <a:pPr algn="ctr"/>
             <a:r>
-              <a:rPr sz="4400" b="1" i="0">
+              <a:rPr sz="4800" b="1" i="0">
                 <a:solidFill>
                   <a:srgbClr val="FFFFFF"/>
                 </a:solidFill>
                 <a:latin typeface="Arial"/>
               </a:rPr>
               <a:t>Estão em ti Amado</a:t>
-            </a:r>
-          </a:p>
-        </p:txBody>
-      </p:sp>
-      <p:sp>
-        <p:nvSpPr>
-          <p:cNvPr id="3" name="TextBox 2"/>
-          <p:cNvSpPr txBox="1"/>
-          <p:nvPr/>
-        </p:nvSpPr>
-        <p:spPr>
-          <a:xfrm>
-            <a:off x="594360" y="3616452"/>
-            <a:ext cx="11002975" cy="347472"/>
-          </a:xfrm>
-          <a:prstGeom prst="rect">
-            <a:avLst/>
-          </a:prstGeom>
-          <a:noFill/>
-        </p:spPr>
-        <p:txBody>
-          <a:bodyPr wrap="square">
-            <a:spAutoFit/>
-          </a:bodyPr>
-          <a:lstStyle/>
-          <a:p>
-            <a:pPr algn="ctr"/>
-            <a:r>
-              <a:rPr sz="2200" b="0" i="1">
-                <a:solidFill>
-                  <a:srgbClr val="8C8C8C"/>
-                </a:solidFill>
-                <a:latin typeface="Arial"/>
-              </a:rPr>
-              <a:t/>
             </a:r>
           </a:p>
         </p:txBody>
@@ -3703,8 +3458,8 @@
         </p:nvSpPr>
         <p:spPr>
           <a:xfrm>
-            <a:off x="594360" y="1837944"/>
-            <a:ext cx="11002975" cy="685800"/>
+            <a:off x="640080" y="1650492"/>
+            <a:ext cx="10911535" cy="731520"/>
           </a:xfrm>
           <a:prstGeom prst="rect">
             <a:avLst/>
@@ -3719,7 +3474,7 @@
           <a:p>
             <a:pPr algn="ctr"/>
             <a:r>
-              <a:rPr sz="4400" b="1" i="0">
+              <a:rPr sz="4800" b="1" i="0">
                 <a:solidFill>
                   <a:srgbClr val="FFFFFF"/>
                 </a:solidFill>
@@ -3738,8 +3493,8 @@
         </p:nvSpPr>
         <p:spPr>
           <a:xfrm>
-            <a:off x="594360" y="2560320"/>
-            <a:ext cx="11002975" cy="384048"/>
+            <a:off x="640080" y="2418588"/>
+            <a:ext cx="10911535" cy="365760"/>
           </a:xfrm>
           <a:prstGeom prst="rect">
             <a:avLst/>
@@ -3756,7 +3511,7 @@
             <a:r>
               <a:rPr sz="2400" b="0" i="1">
                 <a:solidFill>
-                  <a:srgbClr val="B4B4B4"/>
+                  <a:srgbClr val="AAAAAA"/>
                 </a:solidFill>
                 <a:latin typeface="Arial"/>
               </a:rPr>
@@ -3773,8 +3528,8 @@
         </p:nvSpPr>
         <p:spPr>
           <a:xfrm>
-            <a:off x="594360" y="2980944"/>
-            <a:ext cx="11002975" cy="347472"/>
+            <a:off x="640080" y="2985516"/>
+            <a:ext cx="10911535" cy="731520"/>
           </a:xfrm>
           <a:prstGeom prst="rect">
             <a:avLst/>
@@ -3789,13 +3544,13 @@
           <a:p>
             <a:pPr algn="ctr"/>
             <a:r>
-              <a:rPr sz="2000" b="0" i="1">
+              <a:rPr sz="4800" b="1" i="0">
                 <a:solidFill>
-                  <a:srgbClr val="8C8C8C"/>
+                  <a:srgbClr val="FFFFFF"/>
                 </a:solidFill>
                 <a:latin typeface="Arial"/>
               </a:rPr>
-              <a:t/>
+              <a:t>わがいずみ,あなたにある</a:t>
             </a:r>
           </a:p>
         </p:txBody>
@@ -3808,8 +3563,8 @@
         </p:nvSpPr>
         <p:spPr>
           <a:xfrm>
-            <a:off x="594360" y="3529584"/>
-            <a:ext cx="11002975" cy="685800"/>
+            <a:off x="640080" y="3753612"/>
+            <a:ext cx="10911535" cy="365760"/>
           </a:xfrm>
           <a:prstGeom prst="rect">
             <a:avLst/>
@@ -3824,83 +3579,13 @@
           <a:p>
             <a:pPr algn="ctr"/>
             <a:r>
-              <a:rPr sz="4400" b="1" i="0">
-                <a:solidFill>
-                  <a:srgbClr val="FFFFFF"/>
-                </a:solidFill>
-                <a:latin typeface="Arial"/>
-              </a:rPr>
-              <a:t>わがいずみ,あなたにある</a:t>
-            </a:r>
-          </a:p>
-        </p:txBody>
-      </p:sp>
-      <p:sp>
-        <p:nvSpPr>
-          <p:cNvPr id="6" name="TextBox 5"/>
-          <p:cNvSpPr txBox="1"/>
-          <p:nvPr/>
-        </p:nvSpPr>
-        <p:spPr>
-          <a:xfrm>
-            <a:off x="594360" y="4251960"/>
-            <a:ext cx="11002975" cy="384048"/>
-          </a:xfrm>
-          <a:prstGeom prst="rect">
-            <a:avLst/>
-          </a:prstGeom>
-          <a:noFill/>
-        </p:spPr>
-        <p:txBody>
-          <a:bodyPr wrap="square">
-            <a:spAutoFit/>
-          </a:bodyPr>
-          <a:lstStyle/>
-          <a:p>
-            <a:pPr algn="ctr"/>
-            <a:r>
               <a:rPr sz="2400" b="0" i="1">
                 <a:solidFill>
-                  <a:srgbClr val="B4B4B4"/>
+                  <a:srgbClr val="AAAAAA"/>
                 </a:solidFill>
                 <a:latin typeface="Arial"/>
               </a:rPr>
               <a:t>waga izumi anata ni aru</a:t>
-            </a:r>
-          </a:p>
-        </p:txBody>
-      </p:sp>
-      <p:sp>
-        <p:nvSpPr>
-          <p:cNvPr id="7" name="TextBox 6"/>
-          <p:cNvSpPr txBox="1"/>
-          <p:nvPr/>
-        </p:nvSpPr>
-        <p:spPr>
-          <a:xfrm>
-            <a:off x="594360" y="4672584"/>
-            <a:ext cx="11002975" cy="347472"/>
-          </a:xfrm>
-          <a:prstGeom prst="rect">
-            <a:avLst/>
-          </a:prstGeom>
-          <a:noFill/>
-        </p:spPr>
-        <p:txBody>
-          <a:bodyPr wrap="square">
-            <a:spAutoFit/>
-          </a:bodyPr>
-          <a:lstStyle/>
-          <a:p>
-            <a:pPr algn="ctr"/>
-            <a:r>
-              <a:rPr sz="2000" b="0" i="1">
-                <a:solidFill>
-                  <a:srgbClr val="8C8C8C"/>
-                </a:solidFill>
-                <a:latin typeface="Arial"/>
-              </a:rPr>
-              <a:t/>
             </a:r>
           </a:p>
         </p:txBody>
@@ -3939,8 +3624,8 @@
         </p:nvSpPr>
         <p:spPr>
           <a:xfrm>
-            <a:off x="594360" y="1837944"/>
-            <a:ext cx="11002975" cy="685800"/>
+            <a:off x="640080" y="1650492"/>
+            <a:ext cx="10911535" cy="731520"/>
           </a:xfrm>
           <a:prstGeom prst="rect">
             <a:avLst/>
@@ -3955,7 +3640,7 @@
           <a:p>
             <a:pPr algn="ctr"/>
             <a:r>
-              <a:rPr sz="4400" b="1" i="0">
+              <a:rPr sz="4800" b="1" i="0">
                 <a:solidFill>
                   <a:srgbClr val="FFFFFF"/>
                 </a:solidFill>
@@ -3974,8 +3659,8 @@
         </p:nvSpPr>
         <p:spPr>
           <a:xfrm>
-            <a:off x="594360" y="2560320"/>
-            <a:ext cx="11002975" cy="384048"/>
+            <a:off x="640080" y="2418588"/>
+            <a:ext cx="10911535" cy="365760"/>
           </a:xfrm>
           <a:prstGeom prst="rect">
             <a:avLst/>
@@ -3992,7 +3677,7 @@
             <a:r>
               <a:rPr sz="2400" b="0" i="1">
                 <a:solidFill>
-                  <a:srgbClr val="B4B4B4"/>
+                  <a:srgbClr val="AAAAAA"/>
                 </a:solidFill>
                 <a:latin typeface="Arial"/>
               </a:rPr>
@@ -4009,8 +3694,8 @@
         </p:nvSpPr>
         <p:spPr>
           <a:xfrm>
-            <a:off x="594360" y="2980944"/>
-            <a:ext cx="11002975" cy="347472"/>
+            <a:off x="640080" y="2985516"/>
+            <a:ext cx="10911535" cy="731520"/>
           </a:xfrm>
           <a:prstGeom prst="rect">
             <a:avLst/>
@@ -4025,13 +3710,13 @@
           <a:p>
             <a:pPr algn="ctr"/>
             <a:r>
-              <a:rPr sz="2000" b="0" i="1">
+              <a:rPr sz="4800" b="1" i="0">
                 <a:solidFill>
-                  <a:srgbClr val="8C8C8C"/>
+                  <a:srgbClr val="FFFFFF"/>
                 </a:solidFill>
                 <a:latin typeface="Arial"/>
               </a:rPr>
-              <a:t/>
+              <a:t>わがいずみ,あなたにある</a:t>
             </a:r>
           </a:p>
         </p:txBody>
@@ -4044,8 +3729,8 @@
         </p:nvSpPr>
         <p:spPr>
           <a:xfrm>
-            <a:off x="594360" y="3529584"/>
-            <a:ext cx="11002975" cy="685800"/>
+            <a:off x="640080" y="3753612"/>
+            <a:ext cx="10911535" cy="365760"/>
           </a:xfrm>
           <a:prstGeom prst="rect">
             <a:avLst/>
@@ -4060,83 +3745,13 @@
           <a:p>
             <a:pPr algn="ctr"/>
             <a:r>
-              <a:rPr sz="4400" b="1" i="0">
-                <a:solidFill>
-                  <a:srgbClr val="FFFFFF"/>
-                </a:solidFill>
-                <a:latin typeface="Arial"/>
-              </a:rPr>
-              <a:t>わがいずみ,あなたにある</a:t>
-            </a:r>
-          </a:p>
-        </p:txBody>
-      </p:sp>
-      <p:sp>
-        <p:nvSpPr>
-          <p:cNvPr id="6" name="TextBox 5"/>
-          <p:cNvSpPr txBox="1"/>
-          <p:nvPr/>
-        </p:nvSpPr>
-        <p:spPr>
-          <a:xfrm>
-            <a:off x="594360" y="4251960"/>
-            <a:ext cx="11002975" cy="384048"/>
-          </a:xfrm>
-          <a:prstGeom prst="rect">
-            <a:avLst/>
-          </a:prstGeom>
-          <a:noFill/>
-        </p:spPr>
-        <p:txBody>
-          <a:bodyPr wrap="square">
-            <a:spAutoFit/>
-          </a:bodyPr>
-          <a:lstStyle/>
-          <a:p>
-            <a:pPr algn="ctr"/>
-            <a:r>
               <a:rPr sz="2400" b="0" i="1">
                 <a:solidFill>
-                  <a:srgbClr val="B4B4B4"/>
+                  <a:srgbClr val="AAAAAA"/>
                 </a:solidFill>
                 <a:latin typeface="Arial"/>
               </a:rPr>
               <a:t>wa ga izumi anata ni aru</a:t>
-            </a:r>
-          </a:p>
-        </p:txBody>
-      </p:sp>
-      <p:sp>
-        <p:nvSpPr>
-          <p:cNvPr id="7" name="TextBox 6"/>
-          <p:cNvSpPr txBox="1"/>
-          <p:nvPr/>
-        </p:nvSpPr>
-        <p:spPr>
-          <a:xfrm>
-            <a:off x="594360" y="4672584"/>
-            <a:ext cx="11002975" cy="347472"/>
-          </a:xfrm>
-          <a:prstGeom prst="rect">
-            <a:avLst/>
-          </a:prstGeom>
-          <a:noFill/>
-        </p:spPr>
-        <p:txBody>
-          <a:bodyPr wrap="square">
-            <a:spAutoFit/>
-          </a:bodyPr>
-          <a:lstStyle/>
-          <a:p>
-            <a:pPr algn="ctr"/>
-            <a:r>
-              <a:rPr sz="2000" b="0" i="1">
-                <a:solidFill>
-                  <a:srgbClr val="8C8C8C"/>
-                </a:solidFill>
-                <a:latin typeface="Arial"/>
-              </a:rPr>
-              <a:t/>
             </a:r>
           </a:p>
         </p:txBody>

--- a/output_pptx/All_My_Fountains.pptx
+++ b/output_pptx/All_My_Fountains.pptx
@@ -3171,6 +3171,76 @@
           </a:p>
         </p:txBody>
       </p:sp>
+      <p:sp>
+        <p:nvSpPr>
+          <p:cNvPr id="4" name="TextBox 3"/>
+          <p:cNvSpPr txBox="1"/>
+          <p:nvPr/>
+        </p:nvSpPr>
+        <p:spPr>
+          <a:xfrm>
+            <a:off x="640080" y="4128516"/>
+            <a:ext cx="10911535" cy="310896"/>
+          </a:xfrm>
+          <a:prstGeom prst="rect">
+            <a:avLst/>
+          </a:prstGeom>
+          <a:noFill/>
+        </p:spPr>
+        <p:txBody>
+          <a:bodyPr wrap="square">
+            <a:spAutoFit/>
+          </a:bodyPr>
+          <a:lstStyle/>
+          <a:p>
+            <a:pPr algn="ctr"/>
+            <a:r>
+              <a:rPr sz="2000" b="0" i="0">
+                <a:solidFill>
+                  <a:srgbClr val="828282"/>
+                </a:solidFill>
+                <a:latin typeface="Arial"/>
+              </a:rPr>
+              <a:t>すべての泉は</a:t>
+            </a:r>
+          </a:p>
+        </p:txBody>
+      </p:sp>
+      <p:sp>
+        <p:nvSpPr>
+          <p:cNvPr id="5" name="TextBox 4"/>
+          <p:cNvSpPr txBox="1"/>
+          <p:nvPr/>
+        </p:nvSpPr>
+        <p:spPr>
+          <a:xfrm>
+            <a:off x="640080" y="4494276"/>
+            <a:ext cx="10911535" cy="310896"/>
+          </a:xfrm>
+          <a:prstGeom prst="rect">
+            <a:avLst/>
+          </a:prstGeom>
+          <a:noFill/>
+        </p:spPr>
+        <p:txBody>
+          <a:bodyPr wrap="square">
+            <a:spAutoFit/>
+          </a:bodyPr>
+          <a:lstStyle/>
+          <a:p>
+            <a:pPr algn="ctr"/>
+            <a:r>
+              <a:rPr sz="2000" b="0" i="0">
+                <a:solidFill>
+                  <a:srgbClr val="828282"/>
+                </a:solidFill>
+                <a:latin typeface="Arial"/>
+              </a:rPr>
+              <a:t>あなたの中にあります、愛する方</a:t>
+            </a:r>
+          </a:p>
+        </p:txBody>
+      </p:sp>
     </p:spTree>
   </p:cSld>
   <p:clrMapOvr>
@@ -3267,6 +3337,76 @@
           </a:p>
         </p:txBody>
       </p:sp>
+      <p:sp>
+        <p:nvSpPr>
+          <p:cNvPr id="4" name="TextBox 3"/>
+          <p:cNvSpPr txBox="1"/>
+          <p:nvPr/>
+        </p:nvSpPr>
+        <p:spPr>
+          <a:xfrm>
+            <a:off x="640080" y="4128516"/>
+            <a:ext cx="10911535" cy="310896"/>
+          </a:xfrm>
+          <a:prstGeom prst="rect">
+            <a:avLst/>
+          </a:prstGeom>
+          <a:noFill/>
+        </p:spPr>
+        <p:txBody>
+          <a:bodyPr wrap="square">
+            <a:spAutoFit/>
+          </a:bodyPr>
+          <a:lstStyle/>
+          <a:p>
+            <a:pPr algn="ctr"/>
+            <a:r>
+              <a:rPr sz="2000" b="0" i="0">
+                <a:solidFill>
+                  <a:srgbClr val="828282"/>
+                </a:solidFill>
+                <a:latin typeface="Arial"/>
+              </a:rPr>
+              <a:t>天を開いてください</a:t>
+            </a:r>
+          </a:p>
+        </p:txBody>
+      </p:sp>
+      <p:sp>
+        <p:nvSpPr>
+          <p:cNvPr id="5" name="TextBox 4"/>
+          <p:cNvSpPr txBox="1"/>
+          <p:nvPr/>
+        </p:nvSpPr>
+        <p:spPr>
+          <a:xfrm>
+            <a:off x="640080" y="4494276"/>
+            <a:ext cx="10911535" cy="310896"/>
+          </a:xfrm>
+          <a:prstGeom prst="rect">
+            <a:avLst/>
+          </a:prstGeom>
+          <a:noFill/>
+        </p:spPr>
+        <p:txBody>
+          <a:bodyPr wrap="square">
+            <a:spAutoFit/>
+          </a:bodyPr>
+          <a:lstStyle/>
+          <a:p>
+            <a:pPr algn="ctr"/>
+            <a:r>
+              <a:rPr sz="2000" b="0" i="0">
+                <a:solidFill>
+                  <a:srgbClr val="828282"/>
+                </a:solidFill>
+                <a:latin typeface="Arial"/>
+              </a:rPr>
+              <a:t>生ける水よ来てください</a:t>
+            </a:r>
+          </a:p>
+        </p:txBody>
+      </p:sp>
     </p:spTree>
   </p:cSld>
   <p:clrMapOvr>
@@ -3363,6 +3503,76 @@
           </a:p>
         </p:txBody>
       </p:sp>
+      <p:sp>
+        <p:nvSpPr>
+          <p:cNvPr id="4" name="TextBox 3"/>
+          <p:cNvSpPr txBox="1"/>
+          <p:nvPr/>
+        </p:nvSpPr>
+        <p:spPr>
+          <a:xfrm>
+            <a:off x="640080" y="4128516"/>
+            <a:ext cx="10911535" cy="310896"/>
+          </a:xfrm>
+          <a:prstGeom prst="rect">
+            <a:avLst/>
+          </a:prstGeom>
+          <a:noFill/>
+        </p:spPr>
+        <p:txBody>
+          <a:bodyPr wrap="square">
+            <a:spAutoFit/>
+          </a:bodyPr>
+          <a:lstStyle/>
+          <a:p>
+            <a:pPr algn="ctr"/>
+            <a:r>
+              <a:rPr sz="2000" b="0" i="0">
+                <a:solidFill>
+                  <a:srgbClr val="828282"/>
+                </a:solidFill>
+                <a:latin typeface="Arial"/>
+              </a:rPr>
+              <a:t>すべての泉があなたの中にあります</a:t>
+            </a:r>
+          </a:p>
+        </p:txBody>
+      </p:sp>
+      <p:sp>
+        <p:nvSpPr>
+          <p:cNvPr id="5" name="TextBox 4"/>
+          <p:cNvSpPr txBox="1"/>
+          <p:nvPr/>
+        </p:nvSpPr>
+        <p:spPr>
+          <a:xfrm>
+            <a:off x="640080" y="4494276"/>
+            <a:ext cx="10911535" cy="310896"/>
+          </a:xfrm>
+          <a:prstGeom prst="rect">
+            <a:avLst/>
+          </a:prstGeom>
+          <a:noFill/>
+        </p:spPr>
+        <p:txBody>
+          <a:bodyPr wrap="square">
+            <a:spAutoFit/>
+          </a:bodyPr>
+          <a:lstStyle/>
+          <a:p>
+            <a:pPr algn="ctr"/>
+            <a:r>
+              <a:rPr sz="2000" b="0" i="0">
+                <a:solidFill>
+                  <a:srgbClr val="828282"/>
+                </a:solidFill>
+                <a:latin typeface="Arial"/>
+              </a:rPr>
+              <a:t>すべての泉は</a:t>
+            </a:r>
+          </a:p>
+        </p:txBody>
+      </p:sp>
     </p:spTree>
   </p:cSld>
   <p:clrMapOvr>
@@ -3424,6 +3634,41 @@
           </a:p>
         </p:txBody>
       </p:sp>
+      <p:sp>
+        <p:nvSpPr>
+          <p:cNvPr id="3" name="TextBox 2"/>
+          <p:cNvSpPr txBox="1"/>
+          <p:nvPr/>
+        </p:nvSpPr>
+        <p:spPr>
+          <a:xfrm>
+            <a:off x="640080" y="3845052"/>
+            <a:ext cx="10911535" cy="310896"/>
+          </a:xfrm>
+          <a:prstGeom prst="rect">
+            <a:avLst/>
+          </a:prstGeom>
+          <a:noFill/>
+        </p:spPr>
+        <p:txBody>
+          <a:bodyPr wrap="square">
+            <a:spAutoFit/>
+          </a:bodyPr>
+          <a:lstStyle/>
+          <a:p>
+            <a:pPr algn="ctr"/>
+            <a:r>
+              <a:rPr sz="2000" b="0" i="0">
+                <a:solidFill>
+                  <a:srgbClr val="828282"/>
+                </a:solidFill>
+                <a:latin typeface="Arial"/>
+              </a:rPr>
+              <a:t>あなたの中にあります、愛する方</a:t>
+            </a:r>
+          </a:p>
+        </p:txBody>
+      </p:sp>
     </p:spTree>
   </p:cSld>
   <p:clrMapOvr>
@@ -3590,6 +3835,76 @@
           </a:p>
         </p:txBody>
       </p:sp>
+      <p:sp>
+        <p:nvSpPr>
+          <p:cNvPr id="6" name="TextBox 5"/>
+          <p:cNvSpPr txBox="1"/>
+          <p:nvPr/>
+        </p:nvSpPr>
+        <p:spPr>
+          <a:xfrm>
+            <a:off x="640080" y="4530852"/>
+            <a:ext cx="10911535" cy="310896"/>
+          </a:xfrm>
+          <a:prstGeom prst="rect">
+            <a:avLst/>
+          </a:prstGeom>
+          <a:noFill/>
+        </p:spPr>
+        <p:txBody>
+          <a:bodyPr wrap="square">
+            <a:spAutoFit/>
+          </a:bodyPr>
+          <a:lstStyle/>
+          <a:p>
+            <a:pPr algn="ctr"/>
+            <a:r>
+              <a:rPr sz="2000" b="0" i="1">
+                <a:solidFill>
+                  <a:srgbClr val="828282"/>
+                </a:solidFill>
+                <a:latin typeface="Arial"/>
+              </a:rPr>
+              <a:t>Água viva, desça do céu</a:t>
+            </a:r>
+          </a:p>
+        </p:txBody>
+      </p:sp>
+      <p:sp>
+        <p:nvSpPr>
+          <p:cNvPr id="7" name="TextBox 6"/>
+          <p:cNvSpPr txBox="1"/>
+          <p:nvPr/>
+        </p:nvSpPr>
+        <p:spPr>
+          <a:xfrm>
+            <a:off x="640080" y="4896612"/>
+            <a:ext cx="10911535" cy="310896"/>
+          </a:xfrm>
+          <a:prstGeom prst="rect">
+            <a:avLst/>
+          </a:prstGeom>
+          <a:noFill/>
+        </p:spPr>
+        <p:txBody>
+          <a:bodyPr wrap="square">
+            <a:spAutoFit/>
+          </a:bodyPr>
+          <a:lstStyle/>
+          <a:p>
+            <a:pPr algn="ctr"/>
+            <a:r>
+              <a:rPr sz="2000" b="0" i="1">
+                <a:solidFill>
+                  <a:srgbClr val="828282"/>
+                </a:solidFill>
+                <a:latin typeface="Arial"/>
+              </a:rPr>
+              <a:t>Minha fonte está em você</a:t>
+            </a:r>
+          </a:p>
+        </p:txBody>
+      </p:sp>
     </p:spTree>
   </p:cSld>
   <p:clrMapOvr>
@@ -3752,6 +4067,76 @@
                 <a:latin typeface="Arial"/>
               </a:rPr>
               <a:t>wa ga izumi anata ni aru</a:t>
+            </a:r>
+          </a:p>
+        </p:txBody>
+      </p:sp>
+      <p:sp>
+        <p:nvSpPr>
+          <p:cNvPr id="6" name="TextBox 5"/>
+          <p:cNvSpPr txBox="1"/>
+          <p:nvPr/>
+        </p:nvSpPr>
+        <p:spPr>
+          <a:xfrm>
+            <a:off x="640080" y="4530852"/>
+            <a:ext cx="10911535" cy="310896"/>
+          </a:xfrm>
+          <a:prstGeom prst="rect">
+            <a:avLst/>
+          </a:prstGeom>
+          <a:noFill/>
+        </p:spPr>
+        <p:txBody>
+          <a:bodyPr wrap="square">
+            <a:spAutoFit/>
+          </a:bodyPr>
+          <a:lstStyle/>
+          <a:p>
+            <a:pPr algn="ctr"/>
+            <a:r>
+              <a:rPr sz="2000" b="0" i="1">
+                <a:solidFill>
+                  <a:srgbClr val="828282"/>
+                </a:solidFill>
+                <a:latin typeface="Arial"/>
+              </a:rPr>
+              <a:t>O amor de Deus como um rio poderoso</a:t>
+            </a:r>
+          </a:p>
+        </p:txBody>
+      </p:sp>
+      <p:sp>
+        <p:nvSpPr>
+          <p:cNvPr id="7" name="TextBox 6"/>
+          <p:cNvSpPr txBox="1"/>
+          <p:nvPr/>
+        </p:nvSpPr>
+        <p:spPr>
+          <a:xfrm>
+            <a:off x="640080" y="4896612"/>
+            <a:ext cx="10911535" cy="310896"/>
+          </a:xfrm>
+          <a:prstGeom prst="rect">
+            <a:avLst/>
+          </a:prstGeom>
+          <a:noFill/>
+        </p:spPr>
+        <p:txBody>
+          <a:bodyPr wrap="square">
+            <a:spAutoFit/>
+          </a:bodyPr>
+          <a:lstStyle/>
+          <a:p>
+            <a:pPr algn="ctr"/>
+            <a:r>
+              <a:rPr sz="2000" b="0" i="1">
+                <a:solidFill>
+                  <a:srgbClr val="828282"/>
+                </a:solidFill>
+                <a:latin typeface="Arial"/>
+              </a:rPr>
+              <a:t>Minha fonte está em você</a:t>
             </a:r>
           </a:p>
         </p:txBody>
